--- a/templates/dynamic/宣召及啟應-template.pptx
+++ b/templates/dynamic/宣召及啟應-template.pptx
@@ -155,6 +155,96 @@
 </p:presentation>
 </file>
 
+<file path=ppt/changesInfos/changesInfo1.xml><?xml version="1.0" encoding="utf-8"?>
+<pc:chgInfo xmlns:a="http://schemas.openxmlformats.org/drawingml/2006/main" xmlns:r="http://schemas.openxmlformats.org/officeDocument/2006/relationships" xmlns:ac="http://schemas.microsoft.com/office/drawing/2013/main/command" xmlns:pc="http://schemas.microsoft.com/office/powerpoint/2013/main/command">
+  <pc:docChgLst>
+    <pc:chgData name="Sam Fung" userId="e9dde229f212a63a" providerId="LiveId" clId="{0438B005-358E-409D-BDE6-162C49288926}"/>
+    <pc:docChg chg="undo custSel modSld modMainMaster">
+      <pc:chgData name="Sam Fung" userId="e9dde229f212a63a" providerId="LiveId" clId="{0438B005-358E-409D-BDE6-162C49288926}" dt="2026-09-04T15:55:29.106" v="96" actId="207"/>
+      <pc:docMkLst>
+        <pc:docMk/>
+      </pc:docMkLst>
+      <pc:sldChg chg="addSp modSp mod">
+        <pc:chgData name="Sam Fung" userId="e9dde229f212a63a" providerId="LiveId" clId="{0438B005-358E-409D-BDE6-162C49288926}" dt="2026-09-04T15:27:02.427" v="77" actId="962"/>
+        <pc:sldMkLst>
+          <pc:docMk/>
+          <pc:sldMk cId="0" sldId="256"/>
+        </pc:sldMkLst>
+        <pc:spChg chg="add mod">
+          <ac:chgData name="Sam Fung" userId="e9dde229f212a63a" providerId="LiveId" clId="{0438B005-358E-409D-BDE6-162C49288926}" dt="2026-09-04T15:27:02.427" v="77" actId="962"/>
+          <ac:spMkLst>
+            <pc:docMk/>
+            <pc:sldMk cId="0" sldId="256"/>
+            <ac:spMk id="2" creationId="{8429EB85-AE83-625A-2EC6-2A7EC08489AB}"/>
+          </ac:spMkLst>
+        </pc:spChg>
+        <pc:spChg chg="mod">
+          <ac:chgData name="Sam Fung" userId="e9dde229f212a63a" providerId="LiveId" clId="{0438B005-358E-409D-BDE6-162C49288926}" dt="2026-09-04T15:26:40.050" v="76" actId="962"/>
+          <ac:spMkLst>
+            <pc:docMk/>
+            <pc:sldMk cId="0" sldId="256"/>
+            <ac:spMk id="3074" creationId="{00000000-0000-0000-0000-000000000000}"/>
+          </ac:spMkLst>
+        </pc:spChg>
+      </pc:sldChg>
+      <pc:sldChg chg="addSp modSp mod">
+        <pc:chgData name="Sam Fung" userId="e9dde229f212a63a" providerId="LiveId" clId="{0438B005-358E-409D-BDE6-162C49288926}" dt="2026-09-04T15:55:29.106" v="96" actId="207"/>
+        <pc:sldMkLst>
+          <pc:docMk/>
+          <pc:sldMk cId="386892681" sldId="257"/>
+        </pc:sldMkLst>
+        <pc:spChg chg="add mod">
+          <ac:chgData name="Sam Fung" userId="e9dde229f212a63a" providerId="LiveId" clId="{0438B005-358E-409D-BDE6-162C49288926}" dt="2026-09-04T15:55:29.106" v="96" actId="207"/>
+          <ac:spMkLst>
+            <pc:docMk/>
+            <pc:sldMk cId="386892681" sldId="257"/>
+            <ac:spMk id="2" creationId="{C8F1021D-3687-D182-E1AF-DF2594C252B9}"/>
+          </ac:spMkLst>
+        </pc:spChg>
+        <pc:spChg chg="mod">
+          <ac:chgData name="Sam Fung" userId="e9dde229f212a63a" providerId="LiveId" clId="{0438B005-358E-409D-BDE6-162C49288926}" dt="2026-09-04T15:47:32.874" v="94" actId="962"/>
+          <ac:spMkLst>
+            <pc:docMk/>
+            <pc:sldMk cId="386892681" sldId="257"/>
+            <ac:spMk id="8" creationId="{AC95BBD5-A518-B55B-9B89-E8237068CC9E}"/>
+          </ac:spMkLst>
+        </pc:spChg>
+      </pc:sldChg>
+      <pc:sldMasterChg chg="delSp">
+        <pc:chgData name="Sam Fung" userId="e9dde229f212a63a" providerId="LiveId" clId="{0438B005-358E-409D-BDE6-162C49288926}" dt="2026-09-04T12:44:00.827" v="0" actId="478"/>
+        <pc:sldMasterMkLst>
+          <pc:docMk/>
+          <pc:sldMasterMk cId="0" sldId="2147483648"/>
+        </pc:sldMasterMkLst>
+        <pc:picChg chg="del">
+          <ac:chgData name="Sam Fung" userId="e9dde229f212a63a" providerId="LiveId" clId="{0438B005-358E-409D-BDE6-162C49288926}" dt="2026-09-04T12:44:00.827" v="0" actId="478"/>
+          <ac:picMkLst>
+            <pc:docMk/>
+            <pc:sldMasterMk cId="0" sldId="2147483648"/>
+            <ac:picMk id="1026" creationId="{00000000-0000-0000-0000-000000000000}"/>
+          </ac:picMkLst>
+        </pc:picChg>
+      </pc:sldMasterChg>
+      <pc:sldMasterChg chg="delSp mod">
+        <pc:chgData name="Sam Fung" userId="e9dde229f212a63a" providerId="LiveId" clId="{0438B005-358E-409D-BDE6-162C49288926}" dt="2026-09-04T12:45:14.852" v="1" actId="478"/>
+        <pc:sldMasterMkLst>
+          <pc:docMk/>
+          <pc:sldMasterMk cId="0" sldId="2147483667"/>
+        </pc:sldMasterMkLst>
+        <pc:picChg chg="del">
+          <ac:chgData name="Sam Fung" userId="e9dde229f212a63a" providerId="LiveId" clId="{0438B005-358E-409D-BDE6-162C49288926}" dt="2026-09-04T12:45:14.852" v="1" actId="478"/>
+          <ac:picMkLst>
+            <pc:docMk/>
+            <pc:sldMasterMk cId="0" sldId="2147483667"/>
+            <ac:picMk id="8" creationId="{00000000-0000-0000-0000-000000000000}"/>
+          </ac:picMkLst>
+        </pc:picChg>
+      </pc:sldMasterChg>
+    </pc:docChg>
+  </pc:docChgLst>
+</pc:chgInfo>
+</file>
+
 <file path=ppt/slideLayouts/slideLayout1.xml><?xml version="1.0" encoding="utf-8"?>
 <p:sldLayout xmlns:a="http://schemas.openxmlformats.org/drawingml/2006/main" xmlns:r="http://schemas.openxmlformats.org/officeDocument/2006/relationships" xmlns:p="http://schemas.openxmlformats.org/presentationml/2006/main" type="title" preserve="1">
   <p:cSld name="標題投影片">
@@ -353,7 +443,7 @@
             </a:pPr>
             <a:fld id="{0F3BC2CC-BE1F-47BA-9D76-82786A17E1A4}" type="datetimeFigureOut">
               <a:rPr lang="en-US"/>
-              <a:t>8/28/2026</a:t>
+              <a:t>9/4/2026</a:t>
             </a:fld>
             <a:endParaRPr lang="en-US"/>
           </a:p>
@@ -706,7 +796,7 @@
             </a:pPr>
             <a:fld id="{82E0BE58-9E6C-40C0-9C59-7B3739926A05}" type="datetimeFigureOut">
               <a:rPr lang="en-US"/>
-              <a:t>8/28/2026</a:t>
+              <a:t>9/4/2026</a:t>
             </a:fld>
             <a:endParaRPr lang="en-US"/>
           </a:p>
@@ -968,7 +1058,7 @@
             </a:pPr>
             <a:fld id="{93AD1F2F-18B7-4314-859E-DAA6B242E6C2}" type="datetimeFigureOut">
               <a:rPr lang="en-US"/>
-              <a:t>8/28/2026</a:t>
+              <a:t>9/4/2026</a:t>
             </a:fld>
             <a:endParaRPr lang="en-US"/>
           </a:p>
@@ -1521,7 +1611,7 @@
             </a:pPr>
             <a:fld id="{0A2A67E2-7DC7-41E1-9577-9D51ABEB807D}" type="datetimeFigureOut">
               <a:rPr lang="en-US"/>
-              <a:t>8/28/2026</a:t>
+              <a:t>9/4/2026</a:t>
             </a:fld>
             <a:endParaRPr lang="en-US"/>
           </a:p>
@@ -1783,7 +1873,7 @@
             </a:pPr>
             <a:fld id="{7AEE32B1-FBDD-4E26-9545-AE19742DAFCE}" type="datetimeFigureOut">
               <a:rPr lang="en-US"/>
-              <a:t>8/28/2026</a:t>
+              <a:t>9/4/2026</a:t>
             </a:fld>
             <a:endParaRPr lang="en-US"/>
           </a:p>
@@ -2393,7 +2483,7 @@
             </a:pPr>
             <a:fld id="{2B4BB8C6-6B0A-4C09-B829-6008FFA23B52}" type="datetimeFigureOut">
               <a:rPr lang="en-US"/>
-              <a:t>8/28/2026</a:t>
+              <a:t>9/4/2026</a:t>
             </a:fld>
             <a:endParaRPr lang="en-US"/>
           </a:p>
@@ -3276,7 +3366,7 @@
             </a:pPr>
             <a:fld id="{1E42D182-D1F7-4B9A-83F5-79AA37731337}" type="datetimeFigureOut">
               <a:rPr lang="en-US"/>
-              <a:t>8/28/2026</a:t>
+              <a:t>9/4/2026</a:t>
             </a:fld>
             <a:endParaRPr lang="en-US"/>
           </a:p>
@@ -3521,7 +3611,7 @@
             </a:pPr>
             <a:fld id="{A145A4ED-7125-4F1D-9B18-A2A1B4DA0A90}" type="datetimeFigureOut">
               <a:rPr lang="en-US"/>
-              <a:t>8/28/2026</a:t>
+              <a:t>9/4/2026</a:t>
             </a:fld>
             <a:endParaRPr lang="en-US"/>
           </a:p>
@@ -3775,7 +3865,7 @@
             </a:pPr>
             <a:fld id="{5C8BB7C3-40D1-4C4E-ADC1-45561C8A7B3B}" type="datetimeFigureOut">
               <a:rPr lang="en-US"/>
-              <a:t>8/28/2026</a:t>
+              <a:t>9/4/2026</a:t>
             </a:fld>
             <a:endParaRPr lang="en-US"/>
           </a:p>
@@ -4065,7 +4155,7 @@
           <a:p>
             <a:fld id="{E1FA0923-53A4-4EF9-8D36-2211106C1081}" type="datetimeFigureOut">
               <a:rPr lang="zh-HK" altLang="en-US" smtClean="0"/>
-              <a:t>28/8/2026</a:t>
+              <a:t>4/9/2026</a:t>
             </a:fld>
             <a:endParaRPr lang="zh-HK" altLang="en-US"/>
           </a:p>
@@ -4296,7 +4386,7 @@
             </a:pPr>
             <a:fld id="{105D907D-B906-45EC-8C39-B59124F194E3}" type="datetimeFigureOut">
               <a:rPr lang="en-US"/>
-              <a:t>8/28/2026</a:t>
+              <a:t>9/4/2026</a:t>
             </a:fld>
             <a:endParaRPr lang="en-US"/>
           </a:p>
@@ -4612,7 +4702,7 @@
             </a:pPr>
             <a:fld id="{619447EE-ED9D-4F43-A59B-F6C546C0617C}" type="datetimeFigureOut">
               <a:rPr lang="en-US"/>
-              <a:t>8/28/2026</a:t>
+              <a:t>9/4/2026</a:t>
             </a:fld>
             <a:endParaRPr lang="en-US"/>
           </a:p>
@@ -4919,7 +5009,7 @@
             </a:pPr>
             <a:fld id="{193596F1-D71B-432C-95B3-D0D4C3899B26}" type="datetimeFigureOut">
               <a:rPr lang="en-US"/>
-              <a:t>8/28/2026</a:t>
+              <a:t>9/4/2026</a:t>
             </a:fld>
             <a:endParaRPr lang="en-US"/>
           </a:p>
@@ -5374,7 +5464,7 @@
             </a:pPr>
             <a:fld id="{8DACA510-55EA-4321-B8F0-6F4BDDF1E72E}" type="datetimeFigureOut">
               <a:rPr lang="en-US"/>
-              <a:t>8/28/2026</a:t>
+              <a:t>9/4/2026</a:t>
             </a:fld>
             <a:endParaRPr lang="en-US"/>
           </a:p>
@@ -5562,7 +5652,7 @@
             </a:pPr>
             <a:fld id="{29628F27-41F0-4C6F-A0A1-2A455EB2EC6A}" type="datetimeFigureOut">
               <a:rPr lang="en-US"/>
-              <a:t>8/28/2026</a:t>
+              <a:t>9/4/2026</a:t>
             </a:fld>
             <a:endParaRPr lang="en-US"/>
           </a:p>
@@ -5727,7 +5817,7 @@
             </a:pPr>
             <a:fld id="{1461618B-11DC-4397-956E-C7ECDEFC9E5E}" type="datetimeFigureOut">
               <a:rPr lang="en-US"/>
-              <a:t>8/28/2026</a:t>
+              <a:t>9/4/2026</a:t>
             </a:fld>
             <a:endParaRPr lang="en-US"/>
           </a:p>
@@ -6046,7 +6136,7 @@
             </a:pPr>
             <a:fld id="{C4CD9F0B-FDD7-4C3C-A47D-7C2534F85793}" type="datetimeFigureOut">
               <a:rPr lang="en-US"/>
-              <a:t>8/28/2026</a:t>
+              <a:t>9/4/2026</a:t>
             </a:fld>
             <a:endParaRPr lang="en-US"/>
           </a:p>
@@ -6399,7 +6489,7 @@
             </a:pPr>
             <a:fld id="{73B44785-2D78-4BDF-818E-3F8B7D261DED}" type="datetimeFigureOut">
               <a:rPr lang="en-US"/>
-              <a:t>8/28/2026</a:t>
+              <a:t>9/4/2026</a:t>
             </a:fld>
             <a:endParaRPr lang="en-US"/>
           </a:p>
@@ -6502,60 +6592,6 @@
           <a:chExt cx="0" cy="0"/>
         </a:xfrm>
       </p:grpSpPr>
-      <p:pic>
-        <p:nvPicPr>
-          <p:cNvPr id="1026" name="Picture 2" descr="\\DROBO-FS\QuickDrops\JB\PPTX NG\Droplets\LightingOverlay.png"/>
-          <p:cNvPicPr>
-            <a:picLocks noChangeAspect="1" noChangeArrowheads="1"/>
-          </p:cNvPicPr>
-          <p:nvPr/>
-        </p:nvPicPr>
-        <p:blipFill>
-          <a:blip r:embed="rId20">
-            <a:extLst>
-              <a:ext uri="{28A0092B-C50C-407E-A947-70E740481C1C}">
-                <a14:useLocalDpi xmlns:a14="http://schemas.microsoft.com/office/drawing/2010/main" val="0"/>
-              </a:ext>
-            </a:extLst>
-          </a:blip>
-          <a:srcRect/>
-          <a:stretch>
-            <a:fillRect/>
-          </a:stretch>
-        </p:blipFill>
-        <p:spPr bwMode="auto">
-          <a:xfrm>
-            <a:off x="0" y="0"/>
-            <a:ext cx="12192000" cy="6858000"/>
-          </a:xfrm>
-          <a:prstGeom prst="rect">
-            <a:avLst/>
-          </a:prstGeom>
-          <a:noFill/>
-          <a:ln>
-            <a:noFill/>
-          </a:ln>
-          <a:extLst>
-            <a:ext uri="{909E8E84-426E-40DD-AFC4-6F175D3DCCD1}">
-              <a14:hiddenFill xmlns:a14="http://schemas.microsoft.com/office/drawing/2010/main">
-                <a:solidFill>
-                  <a:srgbClr val="FFFFFF"/>
-                </a:solidFill>
-              </a14:hiddenFill>
-            </a:ext>
-            <a:ext uri="{91240B29-F687-4F45-9708-019B960494DF}">
-              <a14:hiddenLine xmlns:a14="http://schemas.microsoft.com/office/drawing/2010/main" w="9525">
-                <a:solidFill>
-                  <a:srgbClr val="000000"/>
-                </a:solidFill>
-                <a:miter lim="800000"/>
-                <a:headEnd/>
-                <a:tailEnd/>
-              </a14:hiddenLine>
-            </a:ext>
-          </a:extLst>
-        </p:spPr>
-      </p:pic>
       <p:sp>
         <p:nvSpPr>
           <p:cNvPr id="2" name="Title Placeholder 1"/>
@@ -6687,7 +6723,7 @@
             </a:pPr>
             <a:fld id="{A6325ED7-EBAC-40D9-9ACF-643BF69E546B}" type="datetimeFigureOut">
               <a:rPr lang="en-US"/>
-              <a:t>8/28/2026</a:t>
+              <a:t>9/4/2026</a:t>
             </a:fld>
             <a:endParaRPr lang="en-US"/>
           </a:p>
@@ -7423,7 +7459,7 @@
           <a:p>
             <a:fld id="{E1FA0923-53A4-4EF9-8D36-2211106C1081}" type="datetimeFigureOut">
               <a:rPr lang="zh-HK" altLang="en-US" smtClean="0"/>
-              <a:t>28/8/2026</a:t>
+              <a:t>4/9/2026</a:t>
             </a:fld>
             <a:endParaRPr lang="zh-HK" altLang="en-US"/>
           </a:p>
@@ -7507,36 +7543,6 @@
           </a:p>
         </p:txBody>
       </p:sp>
-      <p:pic>
-        <p:nvPicPr>
-          <p:cNvPr id="8" name="圖片 7" descr="一張含有 文字, 標誌, 字型, 圖形 的圖片&#10;&#10;自動產生的描述"/>
-          <p:cNvPicPr>
-            <a:picLocks noChangeAspect="1"/>
-          </p:cNvPicPr>
-          <p:nvPr userDrawn="1"/>
-        </p:nvPicPr>
-        <p:blipFill>
-          <a:blip r:embed="rId3">
-            <a:extLst>
-              <a:ext uri="{28A0092B-C50C-407E-A947-70E740481C1C}">
-                <a14:useLocalDpi xmlns:a14="http://schemas.microsoft.com/office/drawing/2010/main" val="0"/>
-              </a:ext>
-            </a:extLst>
-          </a:blip>
-          <a:stretch>
-            <a:fillRect/>
-          </a:stretch>
-        </p:blipFill>
-        <p:spPr>
-          <a:xfrm>
-            <a:off x="0" y="0"/>
-            <a:ext cx="12192000" cy="6858000"/>
-          </a:xfrm>
-          <a:prstGeom prst="rect">
-            <a:avLst/>
-          </a:prstGeom>
-        </p:spPr>
-      </p:pic>
     </p:spTree>
   </p:cSld>
   <p:clrMap bg1="lt1" tx1="dk1" bg2="lt2" tx2="dk2" accent1="accent1" accent2="accent2" accent3="accent3" accent4="accent4" accent5="accent5" accent6="accent6" hlink="hlink" folHlink="folHlink"/>
@@ -7845,7 +7851,7 @@
       </p:grpSpPr>
       <p:sp>
         <p:nvSpPr>
-          <p:cNvPr id="3074" name="CALL_SCRIPTURE_1"/>
+          <p:cNvPr id="3074" name="SCRIPTURE_TEXT_1"/>
           <p:cNvSpPr>
             <a:spLocks noGrp="1"/>
           </p:cNvSpPr>
@@ -7879,7 +7885,7 @@
                 <a:latin typeface="文鼎中圓" panose="020F0609000000000000" pitchFamily="49" charset="-120"/>
                 <a:ea typeface="文鼎中圓" panose="020F0609000000000000" pitchFamily="49" charset="-120"/>
               </a:rPr>
-              <a:t>{{CALL_SCRIPTURE}}</a:t>
+              <a:t>{{SCRIPTURE_TEXT}}</a:t>
             </a:r>
           </a:p>
         </p:txBody>
@@ -8136,6 +8142,218 @@
                 <a:ea typeface="微軟正黑體" panose="020B0604030504040204" pitchFamily="34" charset="-120"/>
               </a:rPr>
               <a:t>宣召</a:t>
+            </a:r>
+          </a:p>
+        </p:txBody>
+      </p:sp>
+      <p:sp>
+        <p:nvSpPr>
+          <p:cNvPr id="2" name="SCRIPTURE_SOURCE_1">
+            <a:extLst>
+              <a:ext uri="{FF2B5EF4-FFF2-40B4-BE49-F238E27FC236}">
+                <a16:creationId xmlns:a16="http://schemas.microsoft.com/office/drawing/2014/main" id="{8429EB85-AE83-625A-2EC6-2A7EC08489AB}"/>
+              </a:ext>
+            </a:extLst>
+          </p:cNvPr>
+          <p:cNvSpPr txBox="1">
+            <a:spLocks/>
+          </p:cNvSpPr>
+          <p:nvPr/>
+        </p:nvSpPr>
+        <p:spPr>
+          <a:xfrm>
+            <a:off x="407988" y="1817347"/>
+            <a:ext cx="11304636" cy="701731"/>
+          </a:xfrm>
+          <a:prstGeom prst="rect">
+            <a:avLst/>
+          </a:prstGeom>
+        </p:spPr>
+        <p:txBody>
+          <a:bodyPr vert="horz" lIns="91440" tIns="45720" rIns="91440" bIns="45720" rtlCol="0" anchor="t">
+            <a:spAutoFit/>
+          </a:bodyPr>
+          <a:lstStyle>
+            <a:lvl1pPr algn="ctr" rtl="0" eaLnBrk="0" fontAlgn="base" hangingPunct="0">
+              <a:lnSpc>
+                <a:spcPct val="90000"/>
+              </a:lnSpc>
+              <a:spcBef>
+                <a:spcPct val="0"/>
+              </a:spcBef>
+              <a:spcAft>
+                <a:spcPct val="0"/>
+              </a:spcAft>
+              <a:defRPr sz="3600" kern="1200" cap="all">
+                <a:solidFill>
+                  <a:schemeClr val="tx1"/>
+                </a:solidFill>
+                <a:latin typeface="+mj-lt"/>
+                <a:ea typeface="+mj-ea"/>
+                <a:cs typeface="+mj-cs"/>
+              </a:defRPr>
+            </a:lvl1pPr>
+            <a:lvl2pPr algn="ctr" rtl="0" eaLnBrk="0" fontAlgn="base" hangingPunct="0">
+              <a:lnSpc>
+                <a:spcPct val="90000"/>
+              </a:lnSpc>
+              <a:spcBef>
+                <a:spcPct val="0"/>
+              </a:spcBef>
+              <a:spcAft>
+                <a:spcPct val="0"/>
+              </a:spcAft>
+              <a:defRPr sz="3600">
+                <a:solidFill>
+                  <a:schemeClr val="tx1"/>
+                </a:solidFill>
+                <a:latin typeface="Tw Cen MT" panose="020B0602020104020603" pitchFamily="34" charset="0"/>
+                <a:ea typeface="新細明體" panose="02020500000000000000" pitchFamily="18" charset="-120"/>
+              </a:defRPr>
+            </a:lvl2pPr>
+            <a:lvl3pPr algn="ctr" rtl="0" eaLnBrk="0" fontAlgn="base" hangingPunct="0">
+              <a:lnSpc>
+                <a:spcPct val="90000"/>
+              </a:lnSpc>
+              <a:spcBef>
+                <a:spcPct val="0"/>
+              </a:spcBef>
+              <a:spcAft>
+                <a:spcPct val="0"/>
+              </a:spcAft>
+              <a:defRPr sz="3600">
+                <a:solidFill>
+                  <a:schemeClr val="tx1"/>
+                </a:solidFill>
+                <a:latin typeface="Tw Cen MT" panose="020B0602020104020603" pitchFamily="34" charset="0"/>
+                <a:ea typeface="新細明體" panose="02020500000000000000" pitchFamily="18" charset="-120"/>
+              </a:defRPr>
+            </a:lvl3pPr>
+            <a:lvl4pPr algn="ctr" rtl="0" eaLnBrk="0" fontAlgn="base" hangingPunct="0">
+              <a:lnSpc>
+                <a:spcPct val="90000"/>
+              </a:lnSpc>
+              <a:spcBef>
+                <a:spcPct val="0"/>
+              </a:spcBef>
+              <a:spcAft>
+                <a:spcPct val="0"/>
+              </a:spcAft>
+              <a:defRPr sz="3600">
+                <a:solidFill>
+                  <a:schemeClr val="tx1"/>
+                </a:solidFill>
+                <a:latin typeface="Tw Cen MT" panose="020B0602020104020603" pitchFamily="34" charset="0"/>
+                <a:ea typeface="新細明體" panose="02020500000000000000" pitchFamily="18" charset="-120"/>
+              </a:defRPr>
+            </a:lvl4pPr>
+            <a:lvl5pPr algn="ctr" rtl="0" eaLnBrk="0" fontAlgn="base" hangingPunct="0">
+              <a:lnSpc>
+                <a:spcPct val="90000"/>
+              </a:lnSpc>
+              <a:spcBef>
+                <a:spcPct val="0"/>
+              </a:spcBef>
+              <a:spcAft>
+                <a:spcPct val="0"/>
+              </a:spcAft>
+              <a:defRPr sz="3600">
+                <a:solidFill>
+                  <a:schemeClr val="tx1"/>
+                </a:solidFill>
+                <a:latin typeface="Tw Cen MT" panose="020B0602020104020603" pitchFamily="34" charset="0"/>
+                <a:ea typeface="新細明體" panose="02020500000000000000" pitchFamily="18" charset="-120"/>
+              </a:defRPr>
+            </a:lvl5pPr>
+            <a:lvl6pPr marL="457200" algn="ctr" rtl="0" fontAlgn="base">
+              <a:lnSpc>
+                <a:spcPct val="90000"/>
+              </a:lnSpc>
+              <a:spcBef>
+                <a:spcPct val="0"/>
+              </a:spcBef>
+              <a:spcAft>
+                <a:spcPct val="0"/>
+              </a:spcAft>
+              <a:defRPr sz="3600">
+                <a:solidFill>
+                  <a:schemeClr val="tx1"/>
+                </a:solidFill>
+                <a:latin typeface="Tw Cen MT" panose="020B0602020104020603" pitchFamily="34" charset="0"/>
+                <a:ea typeface="新細明體" panose="02020500000000000000" pitchFamily="18" charset="-120"/>
+              </a:defRPr>
+            </a:lvl6pPr>
+            <a:lvl7pPr marL="914400" algn="ctr" rtl="0" fontAlgn="base">
+              <a:lnSpc>
+                <a:spcPct val="90000"/>
+              </a:lnSpc>
+              <a:spcBef>
+                <a:spcPct val="0"/>
+              </a:spcBef>
+              <a:spcAft>
+                <a:spcPct val="0"/>
+              </a:spcAft>
+              <a:defRPr sz="3600">
+                <a:solidFill>
+                  <a:schemeClr val="tx1"/>
+                </a:solidFill>
+                <a:latin typeface="Tw Cen MT" panose="020B0602020104020603" pitchFamily="34" charset="0"/>
+                <a:ea typeface="新細明體" panose="02020500000000000000" pitchFamily="18" charset="-120"/>
+              </a:defRPr>
+            </a:lvl7pPr>
+            <a:lvl8pPr marL="1371600" algn="ctr" rtl="0" fontAlgn="base">
+              <a:lnSpc>
+                <a:spcPct val="90000"/>
+              </a:lnSpc>
+              <a:spcBef>
+                <a:spcPct val="0"/>
+              </a:spcBef>
+              <a:spcAft>
+                <a:spcPct val="0"/>
+              </a:spcAft>
+              <a:defRPr sz="3600">
+                <a:solidFill>
+                  <a:schemeClr val="tx1"/>
+                </a:solidFill>
+                <a:latin typeface="Tw Cen MT" panose="020B0602020104020603" pitchFamily="34" charset="0"/>
+                <a:ea typeface="新細明體" panose="02020500000000000000" pitchFamily="18" charset="-120"/>
+              </a:defRPr>
+            </a:lvl8pPr>
+            <a:lvl9pPr marL="1828800" algn="ctr" rtl="0" fontAlgn="base">
+              <a:lnSpc>
+                <a:spcPct val="90000"/>
+              </a:lnSpc>
+              <a:spcBef>
+                <a:spcPct val="0"/>
+              </a:spcBef>
+              <a:spcAft>
+                <a:spcPct val="0"/>
+              </a:spcAft>
+              <a:defRPr sz="3600">
+                <a:solidFill>
+                  <a:schemeClr val="tx1"/>
+                </a:solidFill>
+                <a:latin typeface="Tw Cen MT" panose="020B0602020104020603" pitchFamily="34" charset="0"/>
+                <a:ea typeface="新細明體" panose="02020500000000000000" pitchFamily="18" charset="-120"/>
+              </a:defRPr>
+            </a:lvl9pPr>
+          </a:lstStyle>
+          <a:p>
+            <a:pPr algn="r"/>
+            <a:r>
+              <a:rPr kumimoji="0" lang="en-US" altLang="zh-TW" sz="4400" b="1" dirty="0">
+                <a:solidFill>
+                  <a:srgbClr val="7030A0"/>
+                </a:solidFill>
+                <a:effectLst>
+                  <a:outerShdw blurRad="38100" dist="38100" dir="2700000" algn="tl">
+                    <a:srgbClr val="C0C0C0"/>
+                  </a:outerShdw>
+                </a:effectLst>
+                <a:latin typeface="文鼎中圓" panose="020F0609000000000000" pitchFamily="49" charset="-120"/>
+                <a:ea typeface="文鼎中圓" panose="020F0609000000000000" pitchFamily="49" charset="-120"/>
+              </a:rPr>
+              <a:t>{{SCRIPTURE_SOURCE}}</a:t>
             </a:r>
           </a:p>
         </p:txBody>
@@ -8423,7 +8641,7 @@
       </p:sp>
       <p:sp>
         <p:nvSpPr>
-          <p:cNvPr id="8" name="CALL_RESPONSE_1">
+          <p:cNvPr id="8" name="CALL_RESPONSE_TEXT_1">
             <a:extLst>
               <a:ext uri="{FF2B5EF4-FFF2-40B4-BE49-F238E27FC236}">
                 <a16:creationId xmlns:a16="http://schemas.microsoft.com/office/drawing/2014/main" id="{AC95BBD5-A518-B55B-9B89-E8237068CC9E}"/>
@@ -8627,9 +8845,237 @@
                 <a:latin typeface="文鼎中圓" panose="020F0609000000000000" pitchFamily="49" charset="-120"/>
                 <a:ea typeface="文鼎中圓" panose="020F0609000000000000" pitchFamily="49" charset="-120"/>
               </a:rPr>
-              <a:t>{{CALL_RESPONSE}}</a:t>
+              <a:t>{{CALL_RESPONSE_TEXT}}</a:t>
             </a:r>
             <a:endParaRPr kumimoji="0" lang="zh-TW" altLang="en-US" sz="4200" b="1" dirty="0">
+              <a:effectLst>
+                <a:outerShdw blurRad="38100" dist="38100" dir="2700000" algn="tl">
+                  <a:srgbClr val="000000">
+                    <a:alpha val="43137"/>
+                  </a:srgbClr>
+                </a:outerShdw>
+              </a:effectLst>
+              <a:latin typeface="文鼎中圓" panose="020F0609000000000000" pitchFamily="49" charset="-120"/>
+              <a:ea typeface="文鼎中圓" panose="020F0609000000000000" pitchFamily="49" charset="-120"/>
+            </a:endParaRPr>
+          </a:p>
+        </p:txBody>
+      </p:sp>
+      <p:sp>
+        <p:nvSpPr>
+          <p:cNvPr id="2" name="CALL_RESPONSE_SOURCE_1">
+            <a:extLst>
+              <a:ext uri="{FF2B5EF4-FFF2-40B4-BE49-F238E27FC236}">
+                <a16:creationId xmlns:a16="http://schemas.microsoft.com/office/drawing/2014/main" id="{C8F1021D-3687-D182-E1AF-DF2594C252B9}"/>
+              </a:ext>
+            </a:extLst>
+          </p:cNvPr>
+          <p:cNvSpPr txBox="1">
+            <a:spLocks/>
+          </p:cNvSpPr>
+          <p:nvPr/>
+        </p:nvSpPr>
+        <p:spPr>
+          <a:xfrm>
+            <a:off x="407987" y="1821427"/>
+            <a:ext cx="11449891" cy="674031"/>
+          </a:xfrm>
+          <a:prstGeom prst="rect">
+            <a:avLst/>
+          </a:prstGeom>
+        </p:spPr>
+        <p:txBody>
+          <a:bodyPr vert="horz" lIns="91440" tIns="45720" rIns="91440" bIns="45720" rtlCol="0" anchor="t">
+            <a:spAutoFit/>
+          </a:bodyPr>
+          <a:lstStyle>
+            <a:lvl1pPr algn="ctr" rtl="0" eaLnBrk="0" fontAlgn="base" hangingPunct="0">
+              <a:lnSpc>
+                <a:spcPct val="90000"/>
+              </a:lnSpc>
+              <a:spcBef>
+                <a:spcPct val="0"/>
+              </a:spcBef>
+              <a:spcAft>
+                <a:spcPct val="0"/>
+              </a:spcAft>
+              <a:defRPr sz="3600" kern="1200" cap="all">
+                <a:solidFill>
+                  <a:schemeClr val="tx1"/>
+                </a:solidFill>
+                <a:latin typeface="+mj-lt"/>
+                <a:ea typeface="+mj-ea"/>
+                <a:cs typeface="+mj-cs"/>
+              </a:defRPr>
+            </a:lvl1pPr>
+            <a:lvl2pPr algn="ctr" rtl="0" eaLnBrk="0" fontAlgn="base" hangingPunct="0">
+              <a:lnSpc>
+                <a:spcPct val="90000"/>
+              </a:lnSpc>
+              <a:spcBef>
+                <a:spcPct val="0"/>
+              </a:spcBef>
+              <a:spcAft>
+                <a:spcPct val="0"/>
+              </a:spcAft>
+              <a:defRPr sz="3600">
+                <a:solidFill>
+                  <a:schemeClr val="tx1"/>
+                </a:solidFill>
+                <a:latin typeface="Tw Cen MT" panose="020B0602020104020603" pitchFamily="34" charset="0"/>
+                <a:ea typeface="新細明體" panose="02020500000000000000" pitchFamily="18" charset="-120"/>
+              </a:defRPr>
+            </a:lvl2pPr>
+            <a:lvl3pPr algn="ctr" rtl="0" eaLnBrk="0" fontAlgn="base" hangingPunct="0">
+              <a:lnSpc>
+                <a:spcPct val="90000"/>
+              </a:lnSpc>
+              <a:spcBef>
+                <a:spcPct val="0"/>
+              </a:spcBef>
+              <a:spcAft>
+                <a:spcPct val="0"/>
+              </a:spcAft>
+              <a:defRPr sz="3600">
+                <a:solidFill>
+                  <a:schemeClr val="tx1"/>
+                </a:solidFill>
+                <a:latin typeface="Tw Cen MT" panose="020B0602020104020603" pitchFamily="34" charset="0"/>
+                <a:ea typeface="新細明體" panose="02020500000000000000" pitchFamily="18" charset="-120"/>
+              </a:defRPr>
+            </a:lvl3pPr>
+            <a:lvl4pPr algn="ctr" rtl="0" eaLnBrk="0" fontAlgn="base" hangingPunct="0">
+              <a:lnSpc>
+                <a:spcPct val="90000"/>
+              </a:lnSpc>
+              <a:spcBef>
+                <a:spcPct val="0"/>
+              </a:spcBef>
+              <a:spcAft>
+                <a:spcPct val="0"/>
+              </a:spcAft>
+              <a:defRPr sz="3600">
+                <a:solidFill>
+                  <a:schemeClr val="tx1"/>
+                </a:solidFill>
+                <a:latin typeface="Tw Cen MT" panose="020B0602020104020603" pitchFamily="34" charset="0"/>
+                <a:ea typeface="新細明體" panose="02020500000000000000" pitchFamily="18" charset="-120"/>
+              </a:defRPr>
+            </a:lvl4pPr>
+            <a:lvl5pPr algn="ctr" rtl="0" eaLnBrk="0" fontAlgn="base" hangingPunct="0">
+              <a:lnSpc>
+                <a:spcPct val="90000"/>
+              </a:lnSpc>
+              <a:spcBef>
+                <a:spcPct val="0"/>
+              </a:spcBef>
+              <a:spcAft>
+                <a:spcPct val="0"/>
+              </a:spcAft>
+              <a:defRPr sz="3600">
+                <a:solidFill>
+                  <a:schemeClr val="tx1"/>
+                </a:solidFill>
+                <a:latin typeface="Tw Cen MT" panose="020B0602020104020603" pitchFamily="34" charset="0"/>
+                <a:ea typeface="新細明體" panose="02020500000000000000" pitchFamily="18" charset="-120"/>
+              </a:defRPr>
+            </a:lvl5pPr>
+            <a:lvl6pPr marL="457200" algn="ctr" rtl="0" fontAlgn="base">
+              <a:lnSpc>
+                <a:spcPct val="90000"/>
+              </a:lnSpc>
+              <a:spcBef>
+                <a:spcPct val="0"/>
+              </a:spcBef>
+              <a:spcAft>
+                <a:spcPct val="0"/>
+              </a:spcAft>
+              <a:defRPr sz="3600">
+                <a:solidFill>
+                  <a:schemeClr val="tx1"/>
+                </a:solidFill>
+                <a:latin typeface="Tw Cen MT" panose="020B0602020104020603" pitchFamily="34" charset="0"/>
+                <a:ea typeface="新細明體" panose="02020500000000000000" pitchFamily="18" charset="-120"/>
+              </a:defRPr>
+            </a:lvl6pPr>
+            <a:lvl7pPr marL="914400" algn="ctr" rtl="0" fontAlgn="base">
+              <a:lnSpc>
+                <a:spcPct val="90000"/>
+              </a:lnSpc>
+              <a:spcBef>
+                <a:spcPct val="0"/>
+              </a:spcBef>
+              <a:spcAft>
+                <a:spcPct val="0"/>
+              </a:spcAft>
+              <a:defRPr sz="3600">
+                <a:solidFill>
+                  <a:schemeClr val="tx1"/>
+                </a:solidFill>
+                <a:latin typeface="Tw Cen MT" panose="020B0602020104020603" pitchFamily="34" charset="0"/>
+                <a:ea typeface="新細明體" panose="02020500000000000000" pitchFamily="18" charset="-120"/>
+              </a:defRPr>
+            </a:lvl7pPr>
+            <a:lvl8pPr marL="1371600" algn="ctr" rtl="0" fontAlgn="base">
+              <a:lnSpc>
+                <a:spcPct val="90000"/>
+              </a:lnSpc>
+              <a:spcBef>
+                <a:spcPct val="0"/>
+              </a:spcBef>
+              <a:spcAft>
+                <a:spcPct val="0"/>
+              </a:spcAft>
+              <a:defRPr sz="3600">
+                <a:solidFill>
+                  <a:schemeClr val="tx1"/>
+                </a:solidFill>
+                <a:latin typeface="Tw Cen MT" panose="020B0602020104020603" pitchFamily="34" charset="0"/>
+                <a:ea typeface="新細明體" panose="02020500000000000000" pitchFamily="18" charset="-120"/>
+              </a:defRPr>
+            </a:lvl8pPr>
+            <a:lvl9pPr marL="1828800" algn="ctr" rtl="0" fontAlgn="base">
+              <a:lnSpc>
+                <a:spcPct val="90000"/>
+              </a:lnSpc>
+              <a:spcBef>
+                <a:spcPct val="0"/>
+              </a:spcBef>
+              <a:spcAft>
+                <a:spcPct val="0"/>
+              </a:spcAft>
+              <a:defRPr sz="3600">
+                <a:solidFill>
+                  <a:schemeClr val="tx1"/>
+                </a:solidFill>
+                <a:latin typeface="Tw Cen MT" panose="020B0602020104020603" pitchFamily="34" charset="0"/>
+                <a:ea typeface="新細明體" panose="02020500000000000000" pitchFamily="18" charset="-120"/>
+              </a:defRPr>
+            </a:lvl9pPr>
+          </a:lstStyle>
+          <a:p>
+            <a:pPr marL="1080000" indent="-1080000" algn="r"/>
+            <a:r>
+              <a:rPr kumimoji="0" lang="en-US" altLang="zh-TW" sz="4200" b="1" dirty="0">
+                <a:solidFill>
+                  <a:srgbClr val="7030A0"/>
+                </a:solidFill>
+                <a:effectLst>
+                  <a:outerShdw blurRad="38100" dist="38100" dir="2700000" algn="tl">
+                    <a:srgbClr val="000000">
+                      <a:alpha val="43137"/>
+                    </a:srgbClr>
+                  </a:outerShdw>
+                </a:effectLst>
+                <a:latin typeface="文鼎中圓" panose="020F0609000000000000" pitchFamily="49" charset="-120"/>
+                <a:ea typeface="文鼎中圓" panose="020F0609000000000000" pitchFamily="49" charset="-120"/>
+              </a:rPr>
+              <a:t>{{CALL_RESPONSE_SOURCE}}</a:t>
+            </a:r>
+            <a:endParaRPr kumimoji="0" lang="zh-TW" altLang="en-US" sz="4200" b="1" dirty="0">
+              <a:solidFill>
+                <a:srgbClr val="7030A0"/>
+              </a:solidFill>
               <a:effectLst>
                 <a:outerShdw blurRad="38100" dist="38100" dir="2700000" algn="tl">
                   <a:srgbClr val="000000">
